--- a/docs/user-manual/07-admin.pptx
+++ b/docs/user-manual/07-admin.pptx
@@ -3499,48 +3499,6 @@
                 </a:solidFill>
               </a:rPr>
               <a:t>Needs basic IT literacy; you are the escalation point for all users</a:t>
-            </a:r>
-          </a:p>
-        </p:txBody>
-      </p:sp>
-      <p:sp>
-        <p:nvSpPr>
-          <p:cNvPr id="12" name="TextBox 11"/>
-          <p:cNvSpPr txBox="1"/>
-          <p:nvPr/>
-        </p:nvSpPr>
-        <p:spPr>
-          <a:xfrm>
-            <a:off x="2926080" y="4992624"/>
-            <a:ext cx="6400800" cy="292608"/>
-          </a:xfrm>
-          <a:prstGeom prst="rect">
-            <a:avLst/>
-          </a:prstGeom>
-          <a:noFill/>
-        </p:spPr>
-        <p:txBody>
-          <a:bodyPr wrap="none">
-            <a:spAutoFit/>
-          </a:bodyPr>
-          <a:lstStyle/>
-          <a:p>
-            <a:pPr algn="l"/>
-            <a:r>
-              <a:rPr sz="1100" b="1">
-                <a:solidFill>
-                  <a:srgbClr val="8AB4D8"/>
-                </a:solidFill>
-              </a:rPr>
-              <a:t>Version:  </a:t>
-            </a:r>
-            <a:r>
-              <a:rPr sz="1100">
-                <a:solidFill>
-                  <a:srgbClr val="D0E3F2"/>
-                </a:solidFill>
-              </a:rPr>
-              <a:t>1.0</a:t>
             </a:r>
           </a:p>
         </p:txBody>

--- a/docs/user-manual/07-admin.pptx
+++ b/docs/user-manual/07-admin.pptx
@@ -12,6 +12,7 @@
     <p:sldId id="260" r:id="rId11"/>
     <p:sldId id="261" r:id="rId12"/>
     <p:sldId id="262" r:id="rId13"/>
+    <p:sldId id="263" r:id="rId14"/>
   </p:sldIdLst>
   <p:sldSz cx="12188952" cy="6858000" type="screen4x3"/>
   <p:notesSz cx="6858000" cy="9144000"/>
@@ -3503,6 +3504,48 @@
           </a:p>
         </p:txBody>
       </p:sp>
+      <p:sp>
+        <p:nvSpPr>
+          <p:cNvPr id="12" name="TextBox 11"/>
+          <p:cNvSpPr txBox="1"/>
+          <p:nvPr/>
+        </p:nvSpPr>
+        <p:spPr>
+          <a:xfrm>
+            <a:off x="2926080" y="4992624"/>
+            <a:ext cx="6400800" cy="292608"/>
+          </a:xfrm>
+          <a:prstGeom prst="rect">
+            <a:avLst/>
+          </a:prstGeom>
+          <a:noFill/>
+        </p:spPr>
+        <p:txBody>
+          <a:bodyPr wrap="none">
+            <a:spAutoFit/>
+          </a:bodyPr>
+          <a:lstStyle/>
+          <a:p>
+            <a:pPr algn="l"/>
+            <a:r>
+              <a:rPr sz="1100" b="1">
+                <a:solidFill>
+                  <a:srgbClr val="8AB4D8"/>
+                </a:solidFill>
+              </a:rPr>
+              <a:t>Visibility:  </a:t>
+            </a:r>
+            <a:r>
+              <a:rPr sz="1100">
+                <a:solidFill>
+                  <a:srgbClr val="D0E3F2"/>
+                </a:solidFill>
+              </a:rPr>
+              <a:t>You see all views including Procurement's Incoming PRs</a:t>
+            </a:r>
+          </a:p>
+        </p:txBody>
+      </p:sp>
     </p:spTree>
   </p:cSld>
   <p:clrMapOvr>
@@ -3740,7 +3783,7 @@
                   <a:srgbClr val="111111"/>
                 </a:solidFill>
               </a:rPr>
-              <a:t>See every form for support purposes</a:t>
+              <a:t>See every form and every view in the system (including Incoming PRs)</a:t>
             </a:r>
           </a:p>
           <a:p>
@@ -4085,27 +4128,249 @@
                   <a:srgbClr val="FFFFFF"/>
                 </a:solidFill>
               </a:rPr>
-              <a:t>Task: Create a User</a:t>
-            </a:r>
-          </a:p>
-        </p:txBody>
-      </p:sp>
-      <p:sp>
-        <p:nvSpPr>
-          <p:cNvPr id="4" name="Oval 3"/>
+              <a:t>Role Capabilities — What Each Role Unlocks</a:t>
+            </a:r>
+          </a:p>
+        </p:txBody>
+      </p:sp>
+      <p:sp>
+        <p:nvSpPr>
+          <p:cNvPr id="4" name="TextBox 3"/>
+          <p:cNvSpPr txBox="1"/>
+          <p:nvPr/>
+        </p:nvSpPr>
+        <p:spPr>
+          <a:xfrm>
+            <a:off x="502920" y="1188720"/>
+            <a:ext cx="5454396" cy="347472"/>
+          </a:xfrm>
+          <a:prstGeom prst="rect">
+            <a:avLst/>
+          </a:prstGeom>
+          <a:noFill/>
+        </p:spPr>
+        <p:txBody>
+          <a:bodyPr wrap="square">
+            <a:spAutoFit/>
+          </a:bodyPr>
+          <a:lstStyle/>
+          <a:p>
+            <a:pPr algn="l"/>
+            <a:r>
+              <a:rPr sz="1300" b="1" i="0">
+                <a:solidFill>
+                  <a:srgbClr val="0B4A8A"/>
+                </a:solidFill>
+              </a:rPr>
+              <a:t>initiator</a:t>
+            </a:r>
+          </a:p>
+        </p:txBody>
+      </p:sp>
+      <p:sp>
+        <p:nvSpPr>
+          <p:cNvPr id="5" name="TextBox 4"/>
+          <p:cNvSpPr txBox="1"/>
+          <p:nvPr/>
+        </p:nvSpPr>
+        <p:spPr>
+          <a:xfrm>
+            <a:off x="502920" y="1554480"/>
+            <a:ext cx="5454396" cy="5074920"/>
+          </a:xfrm>
+          <a:prstGeom prst="rect">
+            <a:avLst/>
+          </a:prstGeom>
+          <a:noFill/>
+        </p:spPr>
+        <p:txBody>
+          <a:bodyPr wrap="square">
+            <a:spAutoFit/>
+          </a:bodyPr>
+          <a:lstStyle/>
+          <a:p>
+            <a:pPr>
+              <a:spcBef>
+                <a:spcPts val="300"/>
+              </a:spcBef>
+            </a:pPr>
+            <a:r>
+              <a:rPr sz="1300">
+                <a:solidFill>
+                  <a:srgbClr val="111111"/>
+                </a:solidFill>
+              </a:rPr>
+              <a:t>Create PRs, EFTs, Petty Cash, Expense Claims</a:t>
+            </a:r>
+          </a:p>
+          <a:p>
+            <a:pPr>
+              <a:spcBef>
+                <a:spcPts val="300"/>
+              </a:spcBef>
+            </a:pPr>
+            <a:r>
+              <a:rPr sz="1300">
+                <a:solidFill>
+                  <a:srgbClr val="111111"/>
+                </a:solidFill>
+              </a:rPr>
+              <a:t>View own submissions only</a:t>
+            </a:r>
+          </a:p>
+          <a:p>
+            <a:pPr>
+              <a:spcBef>
+                <a:spcPts val="600"/>
+              </a:spcBef>
+            </a:pPr>
+            <a:r>
+              <a:rPr sz="1400" b="1">
+                <a:solidFill>
+                  <a:srgbClr val="0B4A8A"/>
+                </a:solidFill>
+              </a:rPr>
+              <a:t>hod</a:t>
+            </a:r>
+          </a:p>
+          <a:p>
+            <a:pPr>
+              <a:spcBef>
+                <a:spcPts val="300"/>
+              </a:spcBef>
+            </a:pPr>
+            <a:r>
+              <a:rPr sz="1300">
+                <a:solidFill>
+                  <a:srgbClr val="111111"/>
+                </a:solidFill>
+              </a:rPr>
+              <a:t>Everything initiator can do</a:t>
+            </a:r>
+          </a:p>
+          <a:p>
+            <a:pPr>
+              <a:spcBef>
+                <a:spcPts val="300"/>
+              </a:spcBef>
+            </a:pPr>
+            <a:r>
+              <a:rPr sz="1300">
+                <a:solidFill>
+                  <a:srgbClr val="111111"/>
+                </a:solidFill>
+              </a:rPr>
+              <a:t>Approve / reject dept requests at Stage 1</a:t>
+            </a:r>
+          </a:p>
+          <a:p>
+            <a:pPr>
+              <a:spcBef>
+                <a:spcPts val="300"/>
+              </a:spcBef>
+            </a:pPr>
+            <a:r>
+              <a:rPr sz="1300">
+                <a:solidFill>
+                  <a:srgbClr val="111111"/>
+                </a:solidFill>
+              </a:rPr>
+              <a:t>View dept spend reports</a:t>
+            </a:r>
+          </a:p>
+          <a:p>
+            <a:pPr>
+              <a:spcBef>
+                <a:spcPts val="600"/>
+              </a:spcBef>
+            </a:pPr>
+            <a:r>
+              <a:rPr sz="1400" b="1">
+                <a:solidFill>
+                  <a:srgbClr val="0B4A8A"/>
+                </a:solidFill>
+              </a:rPr>
+              <a:t>procurement</a:t>
+            </a:r>
+          </a:p>
+          <a:p>
+            <a:pPr>
+              <a:spcBef>
+                <a:spcPts val="300"/>
+              </a:spcBef>
+            </a:pPr>
+            <a:r>
+              <a:rPr sz="1300">
+                <a:solidFill>
+                  <a:srgbClr val="111111"/>
+                </a:solidFill>
+              </a:rPr>
+              <a:t>Incoming PRs view (read-only at pending_finance / pending_md)</a:t>
+            </a:r>
+          </a:p>
+          <a:p>
+            <a:pPr>
+              <a:spcBef>
+                <a:spcPts val="300"/>
+              </a:spcBef>
+            </a:pPr>
+            <a:r>
+              <a:rPr sz="1300">
+                <a:solidFill>
+                  <a:srgbClr val="111111"/>
+                </a:solidFill>
+              </a:rPr>
+              <a:t>Add quotes and run adjudication on approved PRs</a:t>
+            </a:r>
+          </a:p>
+          <a:p>
+            <a:pPr>
+              <a:spcBef>
+                <a:spcPts val="300"/>
+              </a:spcBef>
+            </a:pPr>
+            <a:r>
+              <a:rPr sz="1300">
+                <a:solidFill>
+                  <a:srgbClr val="111111"/>
+                </a:solidFill>
+              </a:rPr>
+              <a:t>Manage vendor master list</a:t>
+            </a:r>
+          </a:p>
+          <a:p>
+            <a:pPr>
+              <a:spcBef>
+                <a:spcPts val="300"/>
+              </a:spcBef>
+            </a:pPr>
+            <a:r>
+              <a:rPr sz="1300">
+                <a:solidFill>
+                  <a:srgbClr val="111111"/>
+                </a:solidFill>
+              </a:rPr>
+              <a:t>View all PRs system-wide</a:t>
+            </a:r>
+          </a:p>
+        </p:txBody>
+      </p:sp>
+      <p:sp>
+        <p:nvSpPr>
+          <p:cNvPr id="6" name="Rectangle 5"/>
           <p:cNvSpPr/>
           <p:nvPr/>
         </p:nvSpPr>
         <p:spPr>
           <a:xfrm>
-            <a:off x="502920" y="1243584"/>
-            <a:ext cx="411480" cy="411480"/>
-          </a:xfrm>
-          <a:prstGeom prst="ellipse">
+            <a:off x="6067044" y="1188720"/>
+            <a:ext cx="27432" cy="5349240"/>
+          </a:xfrm>
+          <a:prstGeom prst="rect">
             <a:avLst/>
           </a:prstGeom>
           <a:solidFill>
-            <a:srgbClr val="0B4A8A"/>
+            <a:srgbClr val="CCDDEE"/>
           </a:solidFill>
           <a:ln>
             <a:noFill/>
@@ -4130,27 +4395,19 @@
           <a:lstStyle/>
           <a:p>
             <a:pPr algn="ctr"/>
-            <a:r>
-              <a:rPr sz="1200" b="1">
-                <a:solidFill>
-                  <a:srgbClr val="FFFFFF"/>
-                </a:solidFill>
-              </a:rPr>
-              <a:t>1</a:t>
-            </a:r>
-          </a:p>
-        </p:txBody>
-      </p:sp>
-      <p:sp>
-        <p:nvSpPr>
-          <p:cNvPr id="5" name="TextBox 4"/>
+          </a:p>
+        </p:txBody>
+      </p:sp>
+      <p:sp>
+        <p:nvSpPr>
+          <p:cNvPr id="7" name="TextBox 6"/>
           <p:cNvSpPr txBox="1"/>
           <p:nvPr/>
         </p:nvSpPr>
         <p:spPr>
           <a:xfrm>
-            <a:off x="1033272" y="1188720"/>
-            <a:ext cx="10634472" cy="566928"/>
+            <a:off x="6231636" y="1188720"/>
+            <a:ext cx="5454396" cy="347472"/>
           </a:xfrm>
           <a:prstGeom prst="rect">
             <a:avLst/>
@@ -4165,77 +4422,26 @@
           <a:p>
             <a:pPr algn="l"/>
             <a:r>
-              <a:rPr sz="1300" b="0" i="0">
-                <a:solidFill>
-                  <a:srgbClr val="111111"/>
-                </a:solidFill>
-              </a:rPr>
-              <a:t>Sidebar → Administration → Users → click Add User.</a:t>
-            </a:r>
-          </a:p>
-        </p:txBody>
-      </p:sp>
-      <p:sp>
-        <p:nvSpPr>
-          <p:cNvPr id="6" name="Oval 5"/>
-          <p:cNvSpPr/>
-          <p:nvPr/>
-        </p:nvSpPr>
-        <p:spPr>
-          <a:xfrm>
-            <a:off x="502920" y="1810512"/>
-            <a:ext cx="411480" cy="411480"/>
-          </a:xfrm>
-          <a:prstGeom prst="ellipse">
-            <a:avLst/>
-          </a:prstGeom>
-          <a:solidFill>
-            <a:srgbClr val="0B4A8A"/>
-          </a:solidFill>
-          <a:ln>
-            <a:noFill/>
-          </a:ln>
-        </p:spPr>
-        <p:style>
-          <a:lnRef idx="1">
-            <a:schemeClr val="accent1"/>
-          </a:lnRef>
-          <a:fillRef idx="3">
-            <a:schemeClr val="accent1"/>
-          </a:fillRef>
-          <a:effectRef idx="2">
-            <a:schemeClr val="accent1"/>
-          </a:effectRef>
-          <a:fontRef idx="minor">
-            <a:schemeClr val="lt1"/>
-          </a:fontRef>
-        </p:style>
-        <p:txBody>
-          <a:bodyPr rtlCol="0" anchor="ctr"/>
-          <a:lstStyle/>
-          <a:p>
-            <a:pPr algn="ctr"/>
-            <a:r>
-              <a:rPr sz="1200" b="1">
-                <a:solidFill>
-                  <a:srgbClr val="FFFFFF"/>
-                </a:solidFill>
-              </a:rPr>
-              <a:t>2</a:t>
-            </a:r>
-          </a:p>
-        </p:txBody>
-      </p:sp>
-      <p:sp>
-        <p:nvSpPr>
-          <p:cNvPr id="7" name="TextBox 6"/>
+              <a:rPr sz="1300" b="1" i="0">
+                <a:solidFill>
+                  <a:srgbClr val="0B4A8A"/>
+                </a:solidFill>
+              </a:rPr>
+              <a:t>finance</a:t>
+            </a:r>
+          </a:p>
+        </p:txBody>
+      </p:sp>
+      <p:sp>
+        <p:nvSpPr>
+          <p:cNvPr id="8" name="TextBox 7"/>
           <p:cNvSpPr txBox="1"/>
           <p:nvPr/>
         </p:nvSpPr>
         <p:spPr>
           <a:xfrm>
-            <a:off x="1033272" y="1755648"/>
-            <a:ext cx="10634472" cy="566928"/>
+            <a:off x="6231636" y="1554480"/>
+            <a:ext cx="5454396" cy="5074920"/>
           </a:xfrm>
           <a:prstGeom prst="rect">
             <a:avLst/>
@@ -4248,439 +4454,183 @@
           </a:bodyPr>
           <a:lstStyle/>
           <a:p>
-            <a:pPr algn="l"/>
-            <a:r>
-              <a:rPr sz="1300" b="0" i="0">
+            <a:pPr>
+              <a:spcBef>
+                <a:spcPts val="300"/>
+              </a:spcBef>
+            </a:pPr>
+            <a:r>
+              <a:rPr sz="1300">
                 <a:solidFill>
                   <a:srgbClr val="111111"/>
                 </a:solidFill>
               </a:rPr>
-              <a:t>Fill: Username (e.g. firstname.lastname), Temporary Password (min 8 chars), Full Name, Email, Employee Number.</a:t>
-            </a:r>
-          </a:p>
-        </p:txBody>
-      </p:sp>
-      <p:sp>
-        <p:nvSpPr>
-          <p:cNvPr id="8" name="Oval 7"/>
-          <p:cNvSpPr/>
-          <p:nvPr/>
-        </p:nvSpPr>
-        <p:spPr>
-          <a:xfrm>
-            <a:off x="502920" y="2377440"/>
-            <a:ext cx="411480" cy="411480"/>
-          </a:xfrm>
-          <a:prstGeom prst="ellipse">
-            <a:avLst/>
-          </a:prstGeom>
-          <a:solidFill>
-            <a:srgbClr val="0B4A8A"/>
-          </a:solidFill>
-          <a:ln>
-            <a:noFill/>
-          </a:ln>
-        </p:spPr>
-        <p:style>
-          <a:lnRef idx="1">
-            <a:schemeClr val="accent1"/>
-          </a:lnRef>
-          <a:fillRef idx="3">
-            <a:schemeClr val="accent1"/>
-          </a:fillRef>
-          <a:effectRef idx="2">
-            <a:schemeClr val="accent1"/>
-          </a:effectRef>
-          <a:fontRef idx="minor">
-            <a:schemeClr val="lt1"/>
-          </a:fontRef>
-        </p:style>
-        <p:txBody>
-          <a:bodyPr rtlCol="0" anchor="ctr"/>
-          <a:lstStyle/>
-          <a:p>
-            <a:pPr algn="ctr"/>
-            <a:r>
-              <a:rPr sz="1200" b="1">
-                <a:solidFill>
-                  <a:srgbClr val="FFFFFF"/>
-                </a:solidFill>
-              </a:rPr>
-              <a:t>3</a:t>
-            </a:r>
-          </a:p>
-        </p:txBody>
-      </p:sp>
-      <p:sp>
-        <p:nvSpPr>
-          <p:cNvPr id="9" name="TextBox 8"/>
-          <p:cNvSpPr txBox="1"/>
-          <p:nvPr/>
-        </p:nvSpPr>
-        <p:spPr>
-          <a:xfrm>
-            <a:off x="1033272" y="2322576"/>
-            <a:ext cx="10634472" cy="566928"/>
-          </a:xfrm>
-          <a:prstGeom prst="rect">
-            <a:avLst/>
-          </a:prstGeom>
-          <a:noFill/>
-        </p:spPr>
-        <p:txBody>
-          <a:bodyPr wrap="square">
-            <a:spAutoFit/>
-          </a:bodyPr>
-          <a:lstStyle/>
-          <a:p>
-            <a:pPr algn="l"/>
-            <a:r>
-              <a:rPr sz="1300" b="0" i="0">
+              <a:t>Approve / reject at Stage 2 (pending_finance)</a:t>
+            </a:r>
+          </a:p>
+          <a:p>
+            <a:pPr>
+              <a:spcBef>
+                <a:spcPts val="300"/>
+              </a:spcBef>
+            </a:pPr>
+            <a:r>
+              <a:rPr sz="1300">
                 <a:solidFill>
                   <a:srgbClr val="111111"/>
                 </a:solidFill>
               </a:rPr>
-              <a:t>Assign Role (initiator / hod / procurement / finance / md / admin) and Department.</a:t>
-            </a:r>
-          </a:p>
-        </p:txBody>
-      </p:sp>
-      <p:sp>
-        <p:nvSpPr>
-          <p:cNvPr id="10" name="Oval 9"/>
-          <p:cNvSpPr/>
-          <p:nvPr/>
-        </p:nvSpPr>
-        <p:spPr>
-          <a:xfrm>
-            <a:off x="502920" y="2944368"/>
-            <a:ext cx="411480" cy="411480"/>
-          </a:xfrm>
-          <a:prstGeom prst="ellipse">
-            <a:avLst/>
-          </a:prstGeom>
-          <a:solidFill>
-            <a:srgbClr val="0B4A8A"/>
-          </a:solidFill>
-          <a:ln>
-            <a:noFill/>
-          </a:ln>
-        </p:spPr>
-        <p:style>
-          <a:lnRef idx="1">
-            <a:schemeClr val="accent1"/>
-          </a:lnRef>
-          <a:fillRef idx="3">
-            <a:schemeClr val="accent1"/>
-          </a:fillRef>
-          <a:effectRef idx="2">
-            <a:schemeClr val="accent1"/>
-          </a:effectRef>
-          <a:fontRef idx="minor">
-            <a:schemeClr val="lt1"/>
-          </a:fontRef>
-        </p:style>
-        <p:txBody>
-          <a:bodyPr rtlCol="0" anchor="ctr"/>
-          <a:lstStyle/>
-          <a:p>
-            <a:pPr algn="ctr"/>
-            <a:r>
-              <a:rPr sz="1200" b="1">
-                <a:solidFill>
-                  <a:srgbClr val="FFFFFF"/>
-                </a:solidFill>
-              </a:rPr>
-              <a:t>4</a:t>
-            </a:r>
-          </a:p>
-        </p:txBody>
-      </p:sp>
-      <p:sp>
-        <p:nvSpPr>
-          <p:cNvPr id="11" name="TextBox 10"/>
-          <p:cNvSpPr txBox="1"/>
-          <p:nvPr/>
-        </p:nvSpPr>
-        <p:spPr>
-          <a:xfrm>
-            <a:off x="1033272" y="2889504"/>
-            <a:ext cx="10634472" cy="566928"/>
-          </a:xfrm>
-          <a:prstGeom prst="rect">
-            <a:avLst/>
-          </a:prstGeom>
-          <a:noFill/>
-        </p:spPr>
-        <p:txBody>
-          <a:bodyPr wrap="square">
-            <a:spAutoFit/>
-          </a:bodyPr>
-          <a:lstStyle/>
-          <a:p>
-            <a:pPr algn="l"/>
-            <a:r>
-              <a:rPr sz="1300" b="0" i="0">
+              <a:t>Approve GRNs and Issue Slips</a:t>
+            </a:r>
+          </a:p>
+          <a:p>
+            <a:pPr>
+              <a:spcBef>
+                <a:spcPts val="300"/>
+              </a:spcBef>
+            </a:pPr>
+            <a:r>
+              <a:rPr sz="1300">
                 <a:solidFill>
                   <a:srgbClr val="111111"/>
                 </a:solidFill>
               </a:rPr>
-              <a:t>Tick Is HOD if this person heads their department. Set Supervisor Name to route their requests.</a:t>
-            </a:r>
-          </a:p>
-        </p:txBody>
-      </p:sp>
-      <p:sp>
-        <p:nvSpPr>
-          <p:cNvPr id="12" name="Oval 11"/>
-          <p:cNvSpPr/>
-          <p:nvPr/>
-        </p:nvSpPr>
-        <p:spPr>
-          <a:xfrm>
-            <a:off x="502920" y="3511296"/>
-            <a:ext cx="411480" cy="411480"/>
-          </a:xfrm>
-          <a:prstGeom prst="ellipse">
-            <a:avLst/>
-          </a:prstGeom>
-          <a:solidFill>
-            <a:srgbClr val="0B4A8A"/>
-          </a:solidFill>
-          <a:ln>
-            <a:noFill/>
-          </a:ln>
-        </p:spPr>
-        <p:style>
-          <a:lnRef idx="1">
-            <a:schemeClr val="accent1"/>
-          </a:lnRef>
-          <a:fillRef idx="3">
-            <a:schemeClr val="accent1"/>
-          </a:fillRef>
-          <a:effectRef idx="2">
-            <a:schemeClr val="accent1"/>
-          </a:effectRef>
-          <a:fontRef idx="minor">
-            <a:schemeClr val="lt1"/>
-          </a:fontRef>
-        </p:style>
-        <p:txBody>
-          <a:bodyPr rtlCol="0" anchor="ctr"/>
-          <a:lstStyle/>
-          <a:p>
-            <a:pPr algn="ctr"/>
-            <a:r>
-              <a:rPr sz="1200" b="1">
-                <a:solidFill>
-                  <a:srgbClr val="FFFFFF"/>
-                </a:solidFill>
-              </a:rPr>
-              <a:t>5</a:t>
-            </a:r>
-          </a:p>
-        </p:txBody>
-      </p:sp>
-      <p:sp>
-        <p:nvSpPr>
-          <p:cNvPr id="13" name="TextBox 12"/>
-          <p:cNvSpPr txBox="1"/>
-          <p:nvPr/>
-        </p:nvSpPr>
-        <p:spPr>
-          <a:xfrm>
-            <a:off x="1033272" y="3456432"/>
-            <a:ext cx="10634472" cy="566928"/>
-          </a:xfrm>
-          <a:prstGeom prst="rect">
-            <a:avLst/>
-          </a:prstGeom>
-          <a:noFill/>
-        </p:spPr>
-        <p:txBody>
-          <a:bodyPr wrap="square">
-            <a:spAutoFit/>
-          </a:bodyPr>
-          <a:lstStyle/>
-          <a:p>
-            <a:pPr algn="l"/>
-            <a:r>
-              <a:rPr sz="1300" b="0" i="0">
+              <a:t>Edit budgets and FX rates</a:t>
+            </a:r>
+          </a:p>
+          <a:p>
+            <a:pPr>
+              <a:spcBef>
+                <a:spcPts val="300"/>
+              </a:spcBef>
+            </a:pPr>
+            <a:r>
+              <a:rPr sz="1300">
                 <a:solidFill>
                   <a:srgbClr val="111111"/>
                 </a:solidFill>
               </a:rPr>
-              <a:t>Tick Can Access Stores if the user needs the Stores module.</a:t>
-            </a:r>
-          </a:p>
-        </p:txBody>
-      </p:sp>
-      <p:sp>
-        <p:nvSpPr>
-          <p:cNvPr id="14" name="Oval 13"/>
-          <p:cNvSpPr/>
-          <p:nvPr/>
-        </p:nvSpPr>
-        <p:spPr>
-          <a:xfrm>
-            <a:off x="502920" y="4078224"/>
-            <a:ext cx="411480" cy="411480"/>
-          </a:xfrm>
-          <a:prstGeom prst="ellipse">
-            <a:avLst/>
-          </a:prstGeom>
-          <a:solidFill>
-            <a:srgbClr val="0B4A8A"/>
-          </a:solidFill>
-          <a:ln>
-            <a:noFill/>
-          </a:ln>
-        </p:spPr>
-        <p:style>
-          <a:lnRef idx="1">
-            <a:schemeClr val="accent1"/>
-          </a:lnRef>
-          <a:fillRef idx="3">
-            <a:schemeClr val="accent1"/>
-          </a:fillRef>
-          <a:effectRef idx="2">
-            <a:schemeClr val="accent1"/>
-          </a:effectRef>
-          <a:fontRef idx="minor">
-            <a:schemeClr val="lt1"/>
-          </a:fontRef>
-        </p:style>
-        <p:txBody>
-          <a:bodyPr rtlCol="0" anchor="ctr"/>
-          <a:lstStyle/>
-          <a:p>
-            <a:pPr algn="ctr"/>
-            <a:r>
-              <a:rPr sz="1200" b="1">
-                <a:solidFill>
-                  <a:srgbClr val="FFFFFF"/>
-                </a:solidFill>
-              </a:rPr>
-              <a:t>6</a:t>
-            </a:r>
-          </a:p>
-        </p:txBody>
-      </p:sp>
-      <p:sp>
-        <p:nvSpPr>
-          <p:cNvPr id="15" name="TextBox 14"/>
-          <p:cNvSpPr txBox="1"/>
-          <p:nvPr/>
-        </p:nvSpPr>
-        <p:spPr>
-          <a:xfrm>
-            <a:off x="1033272" y="4023360"/>
-            <a:ext cx="10634472" cy="566928"/>
-          </a:xfrm>
-          <a:prstGeom prst="rect">
-            <a:avLst/>
-          </a:prstGeom>
-          <a:noFill/>
-        </p:spPr>
-        <p:txBody>
-          <a:bodyPr wrap="square">
-            <a:spAutoFit/>
-          </a:bodyPr>
-          <a:lstStyle/>
-          <a:p>
-            <a:pPr algn="l"/>
-            <a:r>
-              <a:rPr sz="1300" b="0" i="0">
+              <a:t>Full analytics access</a:t>
+            </a:r>
+          </a:p>
+          <a:p>
+            <a:pPr>
+              <a:spcBef>
+                <a:spcPts val="600"/>
+              </a:spcBef>
+            </a:pPr>
+            <a:r>
+              <a:rPr sz="1400" b="1">
+                <a:solidFill>
+                  <a:srgbClr val="0B4A8A"/>
+                </a:solidFill>
+              </a:rPr>
+              <a:t>md</a:t>
+            </a:r>
+          </a:p>
+          <a:p>
+            <a:pPr>
+              <a:spcBef>
+                <a:spcPts val="300"/>
+              </a:spcBef>
+            </a:pPr>
+            <a:r>
+              <a:rPr sz="1300">
                 <a:solidFill>
                   <a:srgbClr val="111111"/>
                 </a:solidFill>
               </a:rPr>
-              <a:t>Click Save. The account is active immediately and flagged to force a password change on first login.</a:t>
-            </a:r>
-          </a:p>
-        </p:txBody>
-      </p:sp>
-      <p:sp>
-        <p:nvSpPr>
-          <p:cNvPr id="16" name="Oval 15"/>
-          <p:cNvSpPr/>
-          <p:nvPr/>
-        </p:nvSpPr>
-        <p:spPr>
-          <a:xfrm>
-            <a:off x="502920" y="4645152"/>
-            <a:ext cx="411480" cy="411480"/>
-          </a:xfrm>
-          <a:prstGeom prst="ellipse">
-            <a:avLst/>
-          </a:prstGeom>
-          <a:solidFill>
-            <a:srgbClr val="0B4A8A"/>
-          </a:solidFill>
-          <a:ln>
-            <a:noFill/>
-          </a:ln>
-        </p:spPr>
-        <p:style>
-          <a:lnRef idx="1">
-            <a:schemeClr val="accent1"/>
-          </a:lnRef>
-          <a:fillRef idx="3">
-            <a:schemeClr val="accent1"/>
-          </a:fillRef>
-          <a:effectRef idx="2">
-            <a:schemeClr val="accent1"/>
-          </a:effectRef>
-          <a:fontRef idx="minor">
-            <a:schemeClr val="lt1"/>
-          </a:fontRef>
-        </p:style>
-        <p:txBody>
-          <a:bodyPr rtlCol="0" anchor="ctr"/>
-          <a:lstStyle/>
-          <a:p>
-            <a:pPr algn="ctr"/>
-            <a:r>
-              <a:rPr sz="1200" b="1">
-                <a:solidFill>
-                  <a:srgbClr val="FFFFFF"/>
-                </a:solidFill>
-              </a:rPr>
-              <a:t>7</a:t>
-            </a:r>
-          </a:p>
-        </p:txBody>
-      </p:sp>
-      <p:sp>
-        <p:nvSpPr>
-          <p:cNvPr id="17" name="TextBox 16"/>
-          <p:cNvSpPr txBox="1"/>
-          <p:nvPr/>
-        </p:nvSpPr>
-        <p:spPr>
-          <a:xfrm>
-            <a:off x="1033272" y="4590288"/>
-            <a:ext cx="10634472" cy="566928"/>
-          </a:xfrm>
-          <a:prstGeom prst="rect">
-            <a:avLst/>
-          </a:prstGeom>
-          <a:noFill/>
-        </p:spPr>
-        <p:txBody>
-          <a:bodyPr wrap="square">
-            <a:spAutoFit/>
-          </a:bodyPr>
-          <a:lstStyle/>
-          <a:p>
-            <a:pPr algn="l"/>
-            <a:r>
-              <a:rPr sz="1300" b="0" i="0">
+              <a:t>Final approval on high-value PRs (pending_md)</a:t>
+            </a:r>
+          </a:p>
+          <a:p>
+            <a:pPr>
+              <a:spcBef>
+                <a:spcPts val="300"/>
+              </a:spcBef>
+            </a:pPr>
+            <a:r>
+              <a:rPr sz="1300">
                 <a:solidFill>
                   <a:srgbClr val="111111"/>
                 </a:solidFill>
               </a:rPr>
-              <a:t>Tell the user their temporary password face-to-face or by phone — the system guides them through the change automatically.</a:t>
+              <a:t>View everything; full analytics</a:t>
+            </a:r>
+          </a:p>
+          <a:p>
+            <a:pPr>
+              <a:spcBef>
+                <a:spcPts val="600"/>
+              </a:spcBef>
+            </a:pPr>
+            <a:r>
+              <a:rPr sz="1400" b="1">
+                <a:solidFill>
+                  <a:srgbClr val="0B4A8A"/>
+                </a:solidFill>
+              </a:rPr>
+              <a:t>admin</a:t>
+            </a:r>
+          </a:p>
+          <a:p>
+            <a:pPr>
+              <a:spcBef>
+                <a:spcPts val="300"/>
+              </a:spcBef>
+            </a:pPr>
+            <a:r>
+              <a:rPr sz="1300">
+                <a:solidFill>
+                  <a:srgbClr val="111111"/>
+                </a:solidFill>
+              </a:rPr>
+              <a:t>All of the above plus user management, audit log, client list</a:t>
+            </a:r>
+          </a:p>
+          <a:p>
+            <a:pPr>
+              <a:spcBef>
+                <a:spcPts val="300"/>
+              </a:spcBef>
+            </a:pPr>
+            <a:r>
+              <a:rPr sz="1300">
+                <a:solidFill>
+                  <a:srgbClr val="111111"/>
+                </a:solidFill>
+              </a:rPr>
+              <a:t>Incoming PRs view visible (same as Procurement)</a:t>
+            </a:r>
+          </a:p>
+          <a:p>
+            <a:pPr>
+              <a:spcBef>
+                <a:spcPts val="600"/>
+              </a:spcBef>
+            </a:pPr>
+            <a:r>
+              <a:rPr sz="1400" b="1">
+                <a:solidFill>
+                  <a:srgbClr val="0B4A8A"/>
+                </a:solidFill>
+              </a:rPr>
+              <a:t>stores (flag, not a role)</a:t>
+            </a:r>
+          </a:p>
+          <a:p>
+            <a:pPr>
+              <a:spcBef>
+                <a:spcPts val="300"/>
+              </a:spcBef>
+            </a:pPr>
+            <a:r>
+              <a:rPr sz="1300">
+                <a:solidFill>
+                  <a:srgbClr val="111111"/>
+                </a:solidFill>
+              </a:rPr>
+              <a:t>Unlocks Stores module: GRNs, Issue Slips, Picking Slips, Stock Register</a:t>
             </a:r>
           </a:p>
         </p:txBody>
@@ -4775,54 +4725,20 @@
                   <a:srgbClr val="FFFFFF"/>
                 </a:solidFill>
               </a:rPr>
-              <a:t>Task: Reset a User's Password</a:t>
-            </a:r>
-          </a:p>
-        </p:txBody>
-      </p:sp>
-      <p:sp>
-        <p:nvSpPr>
-          <p:cNvPr id="4" name="TextBox 3"/>
-          <p:cNvSpPr txBox="1"/>
-          <p:nvPr/>
-        </p:nvSpPr>
-        <p:spPr>
-          <a:xfrm>
-            <a:off x="502920" y="1188720"/>
-            <a:ext cx="11183112" cy="320040"/>
-          </a:xfrm>
-          <a:prstGeom prst="rect">
-            <a:avLst/>
-          </a:prstGeom>
-          <a:noFill/>
-        </p:spPr>
-        <p:txBody>
-          <a:bodyPr wrap="square">
-            <a:spAutoFit/>
-          </a:bodyPr>
-          <a:lstStyle/>
-          <a:p>
-            <a:pPr algn="l"/>
-            <a:r>
-              <a:rPr sz="1200" b="0" i="1">
-                <a:solidFill>
-                  <a:srgbClr val="555555"/>
-                </a:solidFill>
-              </a:rPr>
-              <a:t>WARNING: A password reset request by cold email is a social-engineering red flag. Always verify identity first.</a:t>
-            </a:r>
-          </a:p>
-        </p:txBody>
-      </p:sp>
-      <p:sp>
-        <p:nvSpPr>
-          <p:cNvPr id="5" name="Oval 4"/>
+              <a:t>Task: Create a User</a:t>
+            </a:r>
+          </a:p>
+        </p:txBody>
+      </p:sp>
+      <p:sp>
+        <p:nvSpPr>
+          <p:cNvPr id="4" name="Oval 3"/>
           <p:cNvSpPr/>
           <p:nvPr/>
         </p:nvSpPr>
         <p:spPr>
           <a:xfrm>
-            <a:off x="502920" y="1591056"/>
+            <a:off x="502920" y="1243584"/>
             <a:ext cx="411480" cy="411480"/>
           </a:xfrm>
           <a:prstGeom prst="ellipse">
@@ -4867,13 +4783,13 @@
       </p:sp>
       <p:sp>
         <p:nvSpPr>
-          <p:cNvPr id="6" name="TextBox 5"/>
+          <p:cNvPr id="5" name="TextBox 4"/>
           <p:cNvSpPr txBox="1"/>
           <p:nvPr/>
         </p:nvSpPr>
         <p:spPr>
           <a:xfrm>
-            <a:off x="1033272" y="1536192"/>
+            <a:off x="1033272" y="1188720"/>
             <a:ext cx="10634472" cy="566928"/>
           </a:xfrm>
           <a:prstGeom prst="rect">
@@ -4894,20 +4810,20 @@
                   <a:srgbClr val="111111"/>
                 </a:solidFill>
               </a:rPr>
-              <a:t>Verify the user's identity before acting (face-to-face, by phone, or a known channel — not cold email).</a:t>
-            </a:r>
-          </a:p>
-        </p:txBody>
-      </p:sp>
-      <p:sp>
-        <p:nvSpPr>
-          <p:cNvPr id="7" name="Oval 6"/>
+              <a:t>Sidebar → Administration → Users → click Add User.</a:t>
+            </a:r>
+          </a:p>
+        </p:txBody>
+      </p:sp>
+      <p:sp>
+        <p:nvSpPr>
+          <p:cNvPr id="6" name="Oval 5"/>
           <p:cNvSpPr/>
           <p:nvPr/>
         </p:nvSpPr>
         <p:spPr>
           <a:xfrm>
-            <a:off x="502920" y="2157984"/>
+            <a:off x="502920" y="1810512"/>
             <a:ext cx="411480" cy="411480"/>
           </a:xfrm>
           <a:prstGeom prst="ellipse">
@@ -4952,13 +4868,13 @@
       </p:sp>
       <p:sp>
         <p:nvSpPr>
-          <p:cNvPr id="8" name="TextBox 7"/>
+          <p:cNvPr id="7" name="TextBox 6"/>
           <p:cNvSpPr txBox="1"/>
           <p:nvPr/>
         </p:nvSpPr>
         <p:spPr>
           <a:xfrm>
-            <a:off x="1033272" y="2103120"/>
+            <a:off x="1033272" y="1755648"/>
             <a:ext cx="10634472" cy="566928"/>
           </a:xfrm>
           <a:prstGeom prst="rect">
@@ -4979,20 +4895,20 @@
                   <a:srgbClr val="111111"/>
                 </a:solidFill>
               </a:rPr>
-              <a:t>Sidebar → Administration → Users → search and open the user.</a:t>
-            </a:r>
-          </a:p>
-        </p:txBody>
-      </p:sp>
-      <p:sp>
-        <p:nvSpPr>
-          <p:cNvPr id="9" name="Oval 8"/>
+              <a:t>Fill: Username (e.g. firstname.lastname), Temporary Password (min 8 chars), Full Name, Email, Employee Number.</a:t>
+            </a:r>
+          </a:p>
+        </p:txBody>
+      </p:sp>
+      <p:sp>
+        <p:nvSpPr>
+          <p:cNvPr id="8" name="Oval 7"/>
           <p:cNvSpPr/>
           <p:nvPr/>
         </p:nvSpPr>
         <p:spPr>
           <a:xfrm>
-            <a:off x="502920" y="2724912"/>
+            <a:off x="502920" y="2377440"/>
             <a:ext cx="411480" cy="411480"/>
           </a:xfrm>
           <a:prstGeom prst="ellipse">
@@ -5037,13 +4953,13 @@
       </p:sp>
       <p:sp>
         <p:nvSpPr>
-          <p:cNvPr id="10" name="TextBox 9"/>
+          <p:cNvPr id="9" name="TextBox 8"/>
           <p:cNvSpPr txBox="1"/>
           <p:nvPr/>
         </p:nvSpPr>
         <p:spPr>
           <a:xfrm>
-            <a:off x="1033272" y="2670048"/>
+            <a:off x="1033272" y="2322576"/>
             <a:ext cx="10634472" cy="566928"/>
           </a:xfrm>
           <a:prstGeom prst="rect">
@@ -5064,20 +4980,20 @@
                   <a:srgbClr val="111111"/>
                 </a:solidFill>
               </a:rPr>
-              <a:t>Click Reset Password. Enter a new temporary password (min 8 chars). Click Save.</a:t>
-            </a:r>
-          </a:p>
-        </p:txBody>
-      </p:sp>
-      <p:sp>
-        <p:nvSpPr>
-          <p:cNvPr id="11" name="Oval 10"/>
+              <a:t>Assign Role: initiator / hod / procurement / finance / md / admin. (Procurement gets Incoming PRs and vendor management automatically.)</a:t>
+            </a:r>
+          </a:p>
+        </p:txBody>
+      </p:sp>
+      <p:sp>
+        <p:nvSpPr>
+          <p:cNvPr id="10" name="Oval 9"/>
           <p:cNvSpPr/>
           <p:nvPr/>
         </p:nvSpPr>
         <p:spPr>
           <a:xfrm>
-            <a:off x="502920" y="3291840"/>
+            <a:off x="502920" y="2944368"/>
             <a:ext cx="411480" cy="411480"/>
           </a:xfrm>
           <a:prstGeom prst="ellipse">
@@ -5122,13 +5038,13 @@
       </p:sp>
       <p:sp>
         <p:nvSpPr>
-          <p:cNvPr id="12" name="TextBox 11"/>
+          <p:cNvPr id="11" name="TextBox 10"/>
           <p:cNvSpPr txBox="1"/>
           <p:nvPr/>
         </p:nvSpPr>
         <p:spPr>
           <a:xfrm>
-            <a:off x="1033272" y="3236976"/>
+            <a:off x="1033272" y="2889504"/>
             <a:ext cx="10634472" cy="566928"/>
           </a:xfrm>
           <a:prstGeom prst="rect">
@@ -5149,20 +5065,20 @@
                   <a:srgbClr val="111111"/>
                 </a:solidFill>
               </a:rPr>
-              <a:t>The system hashes the password, marks the account for forced change, and logs the action to the audit trail.</a:t>
-            </a:r>
-          </a:p>
-        </p:txBody>
-      </p:sp>
-      <p:sp>
-        <p:nvSpPr>
-          <p:cNvPr id="13" name="Oval 12"/>
+              <a:t>Tick Is HOD if this person heads their department. Set Supervisor Name to route their requests.</a:t>
+            </a:r>
+          </a:p>
+        </p:txBody>
+      </p:sp>
+      <p:sp>
+        <p:nvSpPr>
+          <p:cNvPr id="12" name="Oval 11"/>
           <p:cNvSpPr/>
           <p:nvPr/>
         </p:nvSpPr>
         <p:spPr>
           <a:xfrm>
-            <a:off x="502920" y="3858768"/>
+            <a:off x="502920" y="3511296"/>
             <a:ext cx="411480" cy="411480"/>
           </a:xfrm>
           <a:prstGeom prst="ellipse">
@@ -5207,13 +5123,13 @@
       </p:sp>
       <p:sp>
         <p:nvSpPr>
-          <p:cNvPr id="14" name="TextBox 13"/>
+          <p:cNvPr id="13" name="TextBox 12"/>
           <p:cNvSpPr txBox="1"/>
           <p:nvPr/>
         </p:nvSpPr>
         <p:spPr>
           <a:xfrm>
-            <a:off x="1033272" y="3803904"/>
+            <a:off x="1033272" y="3456432"/>
             <a:ext cx="10634472" cy="566928"/>
           </a:xfrm>
           <a:prstGeom prst="rect">
@@ -5234,20 +5150,20 @@
                   <a:srgbClr val="111111"/>
                 </a:solidFill>
               </a:rPr>
-              <a:t>Tell the user the temporary password face-to-face or by phone.</a:t>
-            </a:r>
-          </a:p>
-        </p:txBody>
-      </p:sp>
-      <p:sp>
-        <p:nvSpPr>
-          <p:cNvPr id="15" name="Oval 14"/>
+              <a:t>Tick Can Access Stores if the user needs GRNs, Issue Slips, and the Stock Register.</a:t>
+            </a:r>
+          </a:p>
+        </p:txBody>
+      </p:sp>
+      <p:sp>
+        <p:nvSpPr>
+          <p:cNvPr id="14" name="Oval 13"/>
           <p:cNvSpPr/>
           <p:nvPr/>
         </p:nvSpPr>
         <p:spPr>
           <a:xfrm>
-            <a:off x="502920" y="4425696"/>
+            <a:off x="502920" y="4078224"/>
             <a:ext cx="411480" cy="411480"/>
           </a:xfrm>
           <a:prstGeom prst="ellipse">
@@ -5292,13 +5208,13 @@
       </p:sp>
       <p:sp>
         <p:nvSpPr>
-          <p:cNvPr id="16" name="TextBox 15"/>
+          <p:cNvPr id="15" name="TextBox 14"/>
           <p:cNvSpPr txBox="1"/>
           <p:nvPr/>
         </p:nvSpPr>
         <p:spPr>
           <a:xfrm>
-            <a:off x="1033272" y="4370832"/>
+            <a:off x="1033272" y="4023360"/>
             <a:ext cx="10634472" cy="566928"/>
           </a:xfrm>
           <a:prstGeom prst="rect">
@@ -5319,7 +5235,92 @@
                   <a:srgbClr val="111111"/>
                 </a:solidFill>
               </a:rPr>
-              <a:t>On their next login the system intercepts and forces them to set a new password and 3 security questions.</a:t>
+              <a:t>Click Save. Account is active immediately; flagged for forced password change on first login.</a:t>
+            </a:r>
+          </a:p>
+        </p:txBody>
+      </p:sp>
+      <p:sp>
+        <p:nvSpPr>
+          <p:cNvPr id="16" name="Oval 15"/>
+          <p:cNvSpPr/>
+          <p:nvPr/>
+        </p:nvSpPr>
+        <p:spPr>
+          <a:xfrm>
+            <a:off x="502920" y="4645152"/>
+            <a:ext cx="411480" cy="411480"/>
+          </a:xfrm>
+          <a:prstGeom prst="ellipse">
+            <a:avLst/>
+          </a:prstGeom>
+          <a:solidFill>
+            <a:srgbClr val="0B4A8A"/>
+          </a:solidFill>
+          <a:ln>
+            <a:noFill/>
+          </a:ln>
+        </p:spPr>
+        <p:style>
+          <a:lnRef idx="1">
+            <a:schemeClr val="accent1"/>
+          </a:lnRef>
+          <a:fillRef idx="3">
+            <a:schemeClr val="accent1"/>
+          </a:fillRef>
+          <a:effectRef idx="2">
+            <a:schemeClr val="accent1"/>
+          </a:effectRef>
+          <a:fontRef idx="minor">
+            <a:schemeClr val="lt1"/>
+          </a:fontRef>
+        </p:style>
+        <p:txBody>
+          <a:bodyPr rtlCol="0" anchor="ctr"/>
+          <a:lstStyle/>
+          <a:p>
+            <a:pPr algn="ctr"/>
+            <a:r>
+              <a:rPr sz="1200" b="1">
+                <a:solidFill>
+                  <a:srgbClr val="FFFFFF"/>
+                </a:solidFill>
+              </a:rPr>
+              <a:t>7</a:t>
+            </a:r>
+          </a:p>
+        </p:txBody>
+      </p:sp>
+      <p:sp>
+        <p:nvSpPr>
+          <p:cNvPr id="17" name="TextBox 16"/>
+          <p:cNvSpPr txBox="1"/>
+          <p:nvPr/>
+        </p:nvSpPr>
+        <p:spPr>
+          <a:xfrm>
+            <a:off x="1033272" y="4590288"/>
+            <a:ext cx="10634472" cy="566928"/>
+          </a:xfrm>
+          <a:prstGeom prst="rect">
+            <a:avLst/>
+          </a:prstGeom>
+          <a:noFill/>
+        </p:spPr>
+        <p:txBody>
+          <a:bodyPr wrap="square">
+            <a:spAutoFit/>
+          </a:bodyPr>
+          <a:lstStyle/>
+          <a:p>
+            <a:pPr algn="l"/>
+            <a:r>
+              <a:rPr sz="1300" b="0" i="0">
+                <a:solidFill>
+                  <a:srgbClr val="111111"/>
+                </a:solidFill>
+              </a:rPr>
+              <a:t>Tell the user their temporary password face-to-face or by phone — the system guides them through the change automatically.</a:t>
             </a:r>
           </a:p>
         </p:txBody>
@@ -5414,7 +5415,7 @@
                   <a:srgbClr val="FFFFFF"/>
                 </a:solidFill>
               </a:rPr>
-              <a:t>Vendors &amp; Clients</a:t>
+              <a:t>Task: Reset a User's Password</a:t>
             </a:r>
           </a:p>
         </p:txBody>
@@ -5428,7 +5429,7 @@
         <p:spPr>
           <a:xfrm>
             <a:off x="502920" y="1188720"/>
-            <a:ext cx="5454396" cy="347472"/>
+            <a:ext cx="11183112" cy="320040"/>
           </a:xfrm>
           <a:prstGeom prst="rect">
             <a:avLst/>
@@ -5443,130 +5444,32 @@
           <a:p>
             <a:pPr algn="l"/>
             <a:r>
-              <a:rPr sz="1300" b="1" i="0">
-                <a:solidFill>
-                  <a:srgbClr val="0B4A8A"/>
-                </a:solidFill>
-              </a:rPr>
-              <a:t>Vendors</a:t>
-            </a:r>
-          </a:p>
-        </p:txBody>
-      </p:sp>
-      <p:sp>
-        <p:nvSpPr>
-          <p:cNvPr id="5" name="TextBox 4"/>
-          <p:cNvSpPr txBox="1"/>
-          <p:nvPr/>
-        </p:nvSpPr>
-        <p:spPr>
-          <a:xfrm>
-            <a:off x="502920" y="1554480"/>
-            <a:ext cx="5454396" cy="5074920"/>
-          </a:xfrm>
-          <a:prstGeom prst="rect">
-            <a:avLst/>
-          </a:prstGeom>
-          <a:noFill/>
-        </p:spPr>
-        <p:txBody>
-          <a:bodyPr wrap="square">
-            <a:spAutoFit/>
-          </a:bodyPr>
-          <a:lstStyle/>
-          <a:p>
-            <a:pPr>
-              <a:spcBef>
-                <a:spcPts val="300"/>
-              </a:spcBef>
-            </a:pPr>
-            <a:r>
-              <a:rPr sz="1300">
-                <a:solidFill>
-                  <a:srgbClr val="111111"/>
-                </a:solidFill>
-              </a:rPr>
-              <a:t>Sidebar → Administration → Vendors</a:t>
-            </a:r>
-          </a:p>
-          <a:p>
-            <a:pPr>
-              <a:spcBef>
-                <a:spcPts val="300"/>
-              </a:spcBef>
-            </a:pPr>
-            <a:r>
-              <a:rPr sz="1300">
-                <a:solidFill>
-                  <a:srgbClr val="111111"/>
-                </a:solidFill>
-              </a:rPr>
-              <a:t>Add vendor: name, code, category, contact, tier (1–3), rating (1–5), status</a:t>
-            </a:r>
-          </a:p>
-          <a:p>
-            <a:pPr>
-              <a:spcBef>
-                <a:spcPts val="300"/>
-              </a:spcBef>
-            </a:pPr>
-            <a:r>
-              <a:rPr sz="1300">
-                <a:solidFill>
-                  <a:srgbClr val="111111"/>
-                </a:solidFill>
-              </a:rPr>
-              <a:t>Deactivate: set Status to inactive — historical quotes preserved</a:t>
-            </a:r>
-          </a:p>
-          <a:p>
-            <a:pPr>
-              <a:spcBef>
-                <a:spcPts val="300"/>
-              </a:spcBef>
-            </a:pPr>
-            <a:r>
-              <a:rPr sz="1300">
-                <a:solidFill>
-                  <a:srgbClr val="111111"/>
-                </a:solidFill>
-              </a:rPr>
-              <a:t>Bulk upload: download template → fill → Upload from Excel</a:t>
-            </a:r>
-          </a:p>
-          <a:p>
-            <a:pPr>
-              <a:spcBef>
-                <a:spcPts val="300"/>
-              </a:spcBef>
-            </a:pPr>
-            <a:r>
-              <a:rPr sz="1300">
-                <a:solidFill>
-                  <a:srgbClr val="111111"/>
-                </a:solidFill>
-              </a:rPr>
-              <a:t>Keep vendor codes stable — changing a code after use can break historical references</a:t>
-            </a:r>
-          </a:p>
-        </p:txBody>
-      </p:sp>
-      <p:sp>
-        <p:nvSpPr>
-          <p:cNvPr id="6" name="Rectangle 5"/>
+              <a:rPr sz="1200" b="0" i="1">
+                <a:solidFill>
+                  <a:srgbClr val="555555"/>
+                </a:solidFill>
+              </a:rPr>
+              <a:t>WARNING: A password reset request by cold email is a social-engineering red flag. Always verify identity first.</a:t>
+            </a:r>
+          </a:p>
+        </p:txBody>
+      </p:sp>
+      <p:sp>
+        <p:nvSpPr>
+          <p:cNvPr id="5" name="Oval 4"/>
           <p:cNvSpPr/>
           <p:nvPr/>
         </p:nvSpPr>
         <p:spPr>
           <a:xfrm>
-            <a:off x="6067044" y="1188720"/>
-            <a:ext cx="27432" cy="5349240"/>
-          </a:xfrm>
-          <a:prstGeom prst="rect">
+            <a:off x="502920" y="1591056"/>
+            <a:ext cx="411480" cy="411480"/>
+          </a:xfrm>
+          <a:prstGeom prst="ellipse">
             <a:avLst/>
           </a:prstGeom>
           <a:solidFill>
-            <a:srgbClr val="CCDDEE"/>
+            <a:srgbClr val="0B4A8A"/>
           </a:solidFill>
           <a:ln>
             <a:noFill/>
@@ -5591,19 +5494,27 @@
           <a:lstStyle/>
           <a:p>
             <a:pPr algn="ctr"/>
-          </a:p>
-        </p:txBody>
-      </p:sp>
-      <p:sp>
-        <p:nvSpPr>
-          <p:cNvPr id="7" name="TextBox 6"/>
+            <a:r>
+              <a:rPr sz="1200" b="1">
+                <a:solidFill>
+                  <a:srgbClr val="FFFFFF"/>
+                </a:solidFill>
+              </a:rPr>
+              <a:t>1</a:t>
+            </a:r>
+          </a:p>
+        </p:txBody>
+      </p:sp>
+      <p:sp>
+        <p:nvSpPr>
+          <p:cNvPr id="6" name="TextBox 5"/>
           <p:cNvSpPr txBox="1"/>
           <p:nvPr/>
         </p:nvSpPr>
         <p:spPr>
           <a:xfrm>
-            <a:off x="6231636" y="1188720"/>
-            <a:ext cx="5454396" cy="347472"/>
+            <a:off x="1033272" y="1536192"/>
+            <a:ext cx="10634472" cy="566928"/>
           </a:xfrm>
           <a:prstGeom prst="rect">
             <a:avLst/>
@@ -5618,12 +5529,63 @@
           <a:p>
             <a:pPr algn="l"/>
             <a:r>
-              <a:rPr sz="1300" b="1" i="0">
-                <a:solidFill>
-                  <a:srgbClr val="0B4A8A"/>
-                </a:solidFill>
-              </a:rPr>
-              <a:t>Clients</a:t>
+              <a:rPr sz="1300" b="0" i="0">
+                <a:solidFill>
+                  <a:srgbClr val="111111"/>
+                </a:solidFill>
+              </a:rPr>
+              <a:t>Verify the user's identity before acting (face-to-face, by phone, or a known channel — not cold email).</a:t>
+            </a:r>
+          </a:p>
+        </p:txBody>
+      </p:sp>
+      <p:sp>
+        <p:nvSpPr>
+          <p:cNvPr id="7" name="Oval 6"/>
+          <p:cNvSpPr/>
+          <p:nvPr/>
+        </p:nvSpPr>
+        <p:spPr>
+          <a:xfrm>
+            <a:off x="502920" y="2157984"/>
+            <a:ext cx="411480" cy="411480"/>
+          </a:xfrm>
+          <a:prstGeom prst="ellipse">
+            <a:avLst/>
+          </a:prstGeom>
+          <a:solidFill>
+            <a:srgbClr val="0B4A8A"/>
+          </a:solidFill>
+          <a:ln>
+            <a:noFill/>
+          </a:ln>
+        </p:spPr>
+        <p:style>
+          <a:lnRef idx="1">
+            <a:schemeClr val="accent1"/>
+          </a:lnRef>
+          <a:fillRef idx="3">
+            <a:schemeClr val="accent1"/>
+          </a:fillRef>
+          <a:effectRef idx="2">
+            <a:schemeClr val="accent1"/>
+          </a:effectRef>
+          <a:fontRef idx="minor">
+            <a:schemeClr val="lt1"/>
+          </a:fontRef>
+        </p:style>
+        <p:txBody>
+          <a:bodyPr rtlCol="0" anchor="ctr"/>
+          <a:lstStyle/>
+          <a:p>
+            <a:pPr algn="ctr"/>
+            <a:r>
+              <a:rPr sz="1200" b="1">
+                <a:solidFill>
+                  <a:srgbClr val="FFFFFF"/>
+                </a:solidFill>
+              </a:rPr>
+              <a:t>2</a:t>
             </a:r>
           </a:p>
         </p:txBody>
@@ -5636,8 +5598,8 @@
         </p:nvSpPr>
         <p:spPr>
           <a:xfrm>
-            <a:off x="6231636" y="1554480"/>
-            <a:ext cx="5454396" cy="5074920"/>
+            <a:off x="1033272" y="2103120"/>
+            <a:ext cx="10634472" cy="566928"/>
           </a:xfrm>
           <a:prstGeom prst="rect">
             <a:avLst/>
@@ -5650,78 +5612,354 @@
           </a:bodyPr>
           <a:lstStyle/>
           <a:p>
-            <a:pPr>
-              <a:spcBef>
-                <a:spcPts val="300"/>
-              </a:spcBef>
-            </a:pPr>
-            <a:r>
-              <a:rPr sz="1300">
+            <a:pPr algn="l"/>
+            <a:r>
+              <a:rPr sz="1300" b="0" i="0">
                 <a:solidFill>
                   <a:srgbClr val="111111"/>
                 </a:solidFill>
               </a:rPr>
-              <a:t>Sidebar → Administration → Clients</a:t>
-            </a:r>
-          </a:p>
-          <a:p>
-            <a:pPr>
-              <a:spcBef>
-                <a:spcPts val="300"/>
-              </a:spcBef>
-            </a:pPr>
-            <a:r>
-              <a:rPr sz="1300">
+              <a:t>Sidebar → Administration → Users → search and open the user.</a:t>
+            </a:r>
+          </a:p>
+        </p:txBody>
+      </p:sp>
+      <p:sp>
+        <p:nvSpPr>
+          <p:cNvPr id="9" name="Oval 8"/>
+          <p:cNvSpPr/>
+          <p:nvPr/>
+        </p:nvSpPr>
+        <p:spPr>
+          <a:xfrm>
+            <a:off x="502920" y="2724912"/>
+            <a:ext cx="411480" cy="411480"/>
+          </a:xfrm>
+          <a:prstGeom prst="ellipse">
+            <a:avLst/>
+          </a:prstGeom>
+          <a:solidFill>
+            <a:srgbClr val="0B4A8A"/>
+          </a:solidFill>
+          <a:ln>
+            <a:noFill/>
+          </a:ln>
+        </p:spPr>
+        <p:style>
+          <a:lnRef idx="1">
+            <a:schemeClr val="accent1"/>
+          </a:lnRef>
+          <a:fillRef idx="3">
+            <a:schemeClr val="accent1"/>
+          </a:fillRef>
+          <a:effectRef idx="2">
+            <a:schemeClr val="accent1"/>
+          </a:effectRef>
+          <a:fontRef idx="minor">
+            <a:schemeClr val="lt1"/>
+          </a:fontRef>
+        </p:style>
+        <p:txBody>
+          <a:bodyPr rtlCol="0" anchor="ctr"/>
+          <a:lstStyle/>
+          <a:p>
+            <a:pPr algn="ctr"/>
+            <a:r>
+              <a:rPr sz="1200" b="1">
+                <a:solidFill>
+                  <a:srgbClr val="FFFFFF"/>
+                </a:solidFill>
+              </a:rPr>
+              <a:t>3</a:t>
+            </a:r>
+          </a:p>
+        </p:txBody>
+      </p:sp>
+      <p:sp>
+        <p:nvSpPr>
+          <p:cNvPr id="10" name="TextBox 9"/>
+          <p:cNvSpPr txBox="1"/>
+          <p:nvPr/>
+        </p:nvSpPr>
+        <p:spPr>
+          <a:xfrm>
+            <a:off x="1033272" y="2670048"/>
+            <a:ext cx="10634472" cy="566928"/>
+          </a:xfrm>
+          <a:prstGeom prst="rect">
+            <a:avLst/>
+          </a:prstGeom>
+          <a:noFill/>
+        </p:spPr>
+        <p:txBody>
+          <a:bodyPr wrap="square">
+            <a:spAutoFit/>
+          </a:bodyPr>
+          <a:lstStyle/>
+          <a:p>
+            <a:pPr algn="l"/>
+            <a:r>
+              <a:rPr sz="1300" b="0" i="0">
                 <a:solidFill>
                   <a:srgbClr val="111111"/>
                 </a:solidFill>
               </a:rPr>
-              <a:t>Clients are external parties whose stock is reserved in your warehouse</a:t>
-            </a:r>
-          </a:p>
-          <a:p>
-            <a:pPr>
-              <a:spcBef>
-                <a:spcPts val="300"/>
-              </a:spcBef>
-            </a:pPr>
-            <a:r>
-              <a:rPr sz="1300">
+              <a:t>Click Reset Password. Enter a new temporary password (min 8 chars). Click Save.</a:t>
+            </a:r>
+          </a:p>
+        </p:txBody>
+      </p:sp>
+      <p:sp>
+        <p:nvSpPr>
+          <p:cNvPr id="11" name="Oval 10"/>
+          <p:cNvSpPr/>
+          <p:nvPr/>
+        </p:nvSpPr>
+        <p:spPr>
+          <a:xfrm>
+            <a:off x="502920" y="3291840"/>
+            <a:ext cx="411480" cy="411480"/>
+          </a:xfrm>
+          <a:prstGeom prst="ellipse">
+            <a:avLst/>
+          </a:prstGeom>
+          <a:solidFill>
+            <a:srgbClr val="0B4A8A"/>
+          </a:solidFill>
+          <a:ln>
+            <a:noFill/>
+          </a:ln>
+        </p:spPr>
+        <p:style>
+          <a:lnRef idx="1">
+            <a:schemeClr val="accent1"/>
+          </a:lnRef>
+          <a:fillRef idx="3">
+            <a:schemeClr val="accent1"/>
+          </a:fillRef>
+          <a:effectRef idx="2">
+            <a:schemeClr val="accent1"/>
+          </a:effectRef>
+          <a:fontRef idx="minor">
+            <a:schemeClr val="lt1"/>
+          </a:fontRef>
+        </p:style>
+        <p:txBody>
+          <a:bodyPr rtlCol="0" anchor="ctr"/>
+          <a:lstStyle/>
+          <a:p>
+            <a:pPr algn="ctr"/>
+            <a:r>
+              <a:rPr sz="1200" b="1">
+                <a:solidFill>
+                  <a:srgbClr val="FFFFFF"/>
+                </a:solidFill>
+              </a:rPr>
+              <a:t>4</a:t>
+            </a:r>
+          </a:p>
+        </p:txBody>
+      </p:sp>
+      <p:sp>
+        <p:nvSpPr>
+          <p:cNvPr id="12" name="TextBox 11"/>
+          <p:cNvSpPr txBox="1"/>
+          <p:nvPr/>
+        </p:nvSpPr>
+        <p:spPr>
+          <a:xfrm>
+            <a:off x="1033272" y="3236976"/>
+            <a:ext cx="10634472" cy="566928"/>
+          </a:xfrm>
+          <a:prstGeom prst="rect">
+            <a:avLst/>
+          </a:prstGeom>
+          <a:noFill/>
+        </p:spPr>
+        <p:txBody>
+          <a:bodyPr wrap="square">
+            <a:spAutoFit/>
+          </a:bodyPr>
+          <a:lstStyle/>
+          <a:p>
+            <a:pPr algn="l"/>
+            <a:r>
+              <a:rPr sz="1300" b="0" i="0">
                 <a:solidFill>
                   <a:srgbClr val="111111"/>
                 </a:solidFill>
               </a:rPr>
-              <a:t>Used on GRNs and Issue Slips when the Customer field is set</a:t>
-            </a:r>
-          </a:p>
-          <a:p>
-            <a:pPr>
-              <a:spcBef>
-                <a:spcPts val="300"/>
-              </a:spcBef>
-            </a:pPr>
-            <a:r>
-              <a:rPr sz="1300">
+              <a:t>The system hashes the password, marks the account for forced change, and logs the action to the audit trail.</a:t>
+            </a:r>
+          </a:p>
+        </p:txBody>
+      </p:sp>
+      <p:sp>
+        <p:nvSpPr>
+          <p:cNvPr id="13" name="Oval 12"/>
+          <p:cNvSpPr/>
+          <p:nvPr/>
+        </p:nvSpPr>
+        <p:spPr>
+          <a:xfrm>
+            <a:off x="502920" y="3858768"/>
+            <a:ext cx="411480" cy="411480"/>
+          </a:xfrm>
+          <a:prstGeom prst="ellipse">
+            <a:avLst/>
+          </a:prstGeom>
+          <a:solidFill>
+            <a:srgbClr val="0B4A8A"/>
+          </a:solidFill>
+          <a:ln>
+            <a:noFill/>
+          </a:ln>
+        </p:spPr>
+        <p:style>
+          <a:lnRef idx="1">
+            <a:schemeClr val="accent1"/>
+          </a:lnRef>
+          <a:fillRef idx="3">
+            <a:schemeClr val="accent1"/>
+          </a:fillRef>
+          <a:effectRef idx="2">
+            <a:schemeClr val="accent1"/>
+          </a:effectRef>
+          <a:fontRef idx="minor">
+            <a:schemeClr val="lt1"/>
+          </a:fontRef>
+        </p:style>
+        <p:txBody>
+          <a:bodyPr rtlCol="0" anchor="ctr"/>
+          <a:lstStyle/>
+          <a:p>
+            <a:pPr algn="ctr"/>
+            <a:r>
+              <a:rPr sz="1200" b="1">
+                <a:solidFill>
+                  <a:srgbClr val="FFFFFF"/>
+                </a:solidFill>
+              </a:rPr>
+              <a:t>5</a:t>
+            </a:r>
+          </a:p>
+        </p:txBody>
+      </p:sp>
+      <p:sp>
+        <p:nvSpPr>
+          <p:cNvPr id="14" name="TextBox 13"/>
+          <p:cNvSpPr txBox="1"/>
+          <p:nvPr/>
+        </p:nvSpPr>
+        <p:spPr>
+          <a:xfrm>
+            <a:off x="1033272" y="3803904"/>
+            <a:ext cx="10634472" cy="566928"/>
+          </a:xfrm>
+          <a:prstGeom prst="rect">
+            <a:avLst/>
+          </a:prstGeom>
+          <a:noFill/>
+        </p:spPr>
+        <p:txBody>
+          <a:bodyPr wrap="square">
+            <a:spAutoFit/>
+          </a:bodyPr>
+          <a:lstStyle/>
+          <a:p>
+            <a:pPr algn="l"/>
+            <a:r>
+              <a:rPr sz="1300" b="0" i="0">
                 <a:solidFill>
                   <a:srgbClr val="111111"/>
                 </a:solidFill>
               </a:rPr>
-              <a:t>Add client: name, code, contact, address, status</a:t>
-            </a:r>
-          </a:p>
-          <a:p>
-            <a:pPr>
-              <a:spcBef>
-                <a:spcPts val="300"/>
-              </a:spcBef>
-            </a:pPr>
-            <a:r>
-              <a:rPr sz="1300">
+              <a:t>Tell the user the temporary password face-to-face or by phone.</a:t>
+            </a:r>
+          </a:p>
+        </p:txBody>
+      </p:sp>
+      <p:sp>
+        <p:nvSpPr>
+          <p:cNvPr id="15" name="Oval 14"/>
+          <p:cNvSpPr/>
+          <p:nvPr/>
+        </p:nvSpPr>
+        <p:spPr>
+          <a:xfrm>
+            <a:off x="502920" y="4425696"/>
+            <a:ext cx="411480" cy="411480"/>
+          </a:xfrm>
+          <a:prstGeom prst="ellipse">
+            <a:avLst/>
+          </a:prstGeom>
+          <a:solidFill>
+            <a:srgbClr val="0B4A8A"/>
+          </a:solidFill>
+          <a:ln>
+            <a:noFill/>
+          </a:ln>
+        </p:spPr>
+        <p:style>
+          <a:lnRef idx="1">
+            <a:schemeClr val="accent1"/>
+          </a:lnRef>
+          <a:fillRef idx="3">
+            <a:schemeClr val="accent1"/>
+          </a:fillRef>
+          <a:effectRef idx="2">
+            <a:schemeClr val="accent1"/>
+          </a:effectRef>
+          <a:fontRef idx="minor">
+            <a:schemeClr val="lt1"/>
+          </a:fontRef>
+        </p:style>
+        <p:txBody>
+          <a:bodyPr rtlCol="0" anchor="ctr"/>
+          <a:lstStyle/>
+          <a:p>
+            <a:pPr algn="ctr"/>
+            <a:r>
+              <a:rPr sz="1200" b="1">
+                <a:solidFill>
+                  <a:srgbClr val="FFFFFF"/>
+                </a:solidFill>
+              </a:rPr>
+              <a:t>6</a:t>
+            </a:r>
+          </a:p>
+        </p:txBody>
+      </p:sp>
+      <p:sp>
+        <p:nvSpPr>
+          <p:cNvPr id="16" name="TextBox 15"/>
+          <p:cNvSpPr txBox="1"/>
+          <p:nvPr/>
+        </p:nvSpPr>
+        <p:spPr>
+          <a:xfrm>
+            <a:off x="1033272" y="4370832"/>
+            <a:ext cx="10634472" cy="566928"/>
+          </a:xfrm>
+          <a:prstGeom prst="rect">
+            <a:avLst/>
+          </a:prstGeom>
+          <a:noFill/>
+        </p:spPr>
+        <p:txBody>
+          <a:bodyPr wrap="square">
+            <a:spAutoFit/>
+          </a:bodyPr>
+          <a:lstStyle/>
+          <a:p>
+            <a:pPr algn="l"/>
+            <a:r>
+              <a:rPr sz="1300" b="0" i="0">
                 <a:solidFill>
                   <a:srgbClr val="111111"/>
                 </a:solidFill>
               </a:rPr>
-              <a:t>Deactivate: set Status to inactive</a:t>
+              <a:t>On their next login the system intercepts and forces them to set a new password and 3 security questions.</a:t>
             </a:r>
           </a:p>
         </p:txBody>
@@ -5816,7 +6054,7 @@
                   <a:srgbClr val="FFFFFF"/>
                 </a:solidFill>
               </a:rPr>
-              <a:t>Budgets, FX, Audit Log &amp; Emergency Reassignment</a:t>
+              <a:t>Vendors &amp; Clients</a:t>
             </a:r>
           </a:p>
         </p:txBody>
@@ -5830,7 +6068,7 @@
         <p:spPr>
           <a:xfrm>
             <a:off x="502920" y="1188720"/>
-            <a:ext cx="11183112" cy="5440680"/>
+            <a:ext cx="5454396" cy="347472"/>
           </a:xfrm>
           <a:prstGeom prst="rect">
             <a:avLst/>
@@ -5843,20 +6081,39 @@
           </a:bodyPr>
           <a:lstStyle/>
           <a:p>
-            <a:pPr>
-              <a:spcBef>
-                <a:spcPts val="600"/>
-              </a:spcBef>
-            </a:pPr>
-            <a:r>
-              <a:rPr sz="1400" b="1">
+            <a:pPr algn="l"/>
+            <a:r>
+              <a:rPr sz="1300" b="1" i="0">
                 <a:solidFill>
                   <a:srgbClr val="0B4A8A"/>
                 </a:solidFill>
               </a:rPr>
-              <a:t>Budgets</a:t>
-            </a:r>
-          </a:p>
+              <a:t>Vendors</a:t>
+            </a:r>
+          </a:p>
+        </p:txBody>
+      </p:sp>
+      <p:sp>
+        <p:nvSpPr>
+          <p:cNvPr id="5" name="TextBox 4"/>
+          <p:cNvSpPr txBox="1"/>
+          <p:nvPr/>
+        </p:nvSpPr>
+        <p:spPr>
+          <a:xfrm>
+            <a:off x="502920" y="1554480"/>
+            <a:ext cx="5454396" cy="5074920"/>
+          </a:xfrm>
+          <a:prstGeom prst="rect">
+            <a:avLst/>
+          </a:prstGeom>
+          <a:noFill/>
+        </p:spPr>
+        <p:txBody>
+          <a:bodyPr wrap="square">
+            <a:spAutoFit/>
+          </a:bodyPr>
+          <a:lstStyle/>
           <a:p>
             <a:pPr>
               <a:spcBef>
@@ -5869,7 +6126,7 @@
                   <a:srgbClr val="111111"/>
                 </a:solidFill>
               </a:rPr>
-              <a:t>Sidebar → Financial Planning → Budgets — set annual budget per dept in ZMW</a:t>
+              <a:t>Sidebar → Administration → Vendors</a:t>
             </a:r>
           </a:p>
           <a:p>
@@ -5884,22 +6141,7 @@
                   <a:srgbClr val="111111"/>
                 </a:solidFill>
               </a:rPr>
-              <a:t>Year-end: reset Spent to zero, set new year values; coordinate timing with Finance</a:t>
-            </a:r>
-          </a:p>
-          <a:p>
-            <a:pPr>
-              <a:spcBef>
-                <a:spcPts val="600"/>
-              </a:spcBef>
-            </a:pPr>
-            <a:r>
-              <a:rPr sz="1400" b="1">
-                <a:solidFill>
-                  <a:srgbClr val="0B4A8A"/>
-                </a:solidFill>
-              </a:rPr>
-              <a:t>FX Rates</a:t>
+              <a:t>Add vendor: name, code, category, contact, tier (1–3), rating (1–5), status</a:t>
             </a:r>
           </a:p>
           <a:p>
@@ -5914,22 +6156,7 @@
                   <a:srgbClr val="111111"/>
                 </a:solidFill>
               </a:rPr>
-              <a:t>Sidebar → Financial Planning → FX Rates — update only when Finance is unavailable; document the source</a:t>
-            </a:r>
-          </a:p>
-          <a:p>
-            <a:pPr>
-              <a:spcBef>
-                <a:spcPts val="600"/>
-              </a:spcBef>
-            </a:pPr>
-            <a:r>
-              <a:rPr sz="1400" b="1">
-                <a:solidFill>
-                  <a:srgbClr val="0B4A8A"/>
-                </a:solidFill>
-              </a:rPr>
-              <a:t>Audit Log</a:t>
+              <a:t>Deactivate: set Status to inactive — historical quotes preserved</a:t>
             </a:r>
           </a:p>
           <a:p>
@@ -5944,7 +6171,7 @@
                   <a:srgbClr val="111111"/>
                 </a:solidFill>
               </a:rPr>
-              <a:t>Sidebar → Administration → Audit Log — every approval, rejection, and status change is recorded permanently</a:t>
+              <a:t>Bulk upload: download template → fill → Upload from Excel</a:t>
             </a:r>
           </a:p>
           <a:p>
@@ -5959,24 +6186,109 @@
                   <a:srgbClr val="111111"/>
                 </a:solidFill>
               </a:rPr>
-              <a:t>You cannot modify or delete audit entries — add a comment on the record if correction context is needed</a:t>
-            </a:r>
-          </a:p>
-          <a:p>
-            <a:pPr>
-              <a:spcBef>
-                <a:spcPts val="600"/>
-              </a:spcBef>
-            </a:pPr>
-            <a:r>
-              <a:rPr sz="1400" b="1">
+              <a:t>Keep vendor codes stable — changing a code after use can break historical references</a:t>
+            </a:r>
+          </a:p>
+        </p:txBody>
+      </p:sp>
+      <p:sp>
+        <p:nvSpPr>
+          <p:cNvPr id="6" name="Rectangle 5"/>
+          <p:cNvSpPr/>
+          <p:nvPr/>
+        </p:nvSpPr>
+        <p:spPr>
+          <a:xfrm>
+            <a:off x="6067044" y="1188720"/>
+            <a:ext cx="27432" cy="5349240"/>
+          </a:xfrm>
+          <a:prstGeom prst="rect">
+            <a:avLst/>
+          </a:prstGeom>
+          <a:solidFill>
+            <a:srgbClr val="CCDDEE"/>
+          </a:solidFill>
+          <a:ln>
+            <a:noFill/>
+          </a:ln>
+        </p:spPr>
+        <p:style>
+          <a:lnRef idx="1">
+            <a:schemeClr val="accent1"/>
+          </a:lnRef>
+          <a:fillRef idx="3">
+            <a:schemeClr val="accent1"/>
+          </a:fillRef>
+          <a:effectRef idx="2">
+            <a:schemeClr val="accent1"/>
+          </a:effectRef>
+          <a:fontRef idx="minor">
+            <a:schemeClr val="lt1"/>
+          </a:fontRef>
+        </p:style>
+        <p:txBody>
+          <a:bodyPr rtlCol="0" anchor="ctr"/>
+          <a:lstStyle/>
+          <a:p>
+            <a:pPr algn="ctr"/>
+          </a:p>
+        </p:txBody>
+      </p:sp>
+      <p:sp>
+        <p:nvSpPr>
+          <p:cNvPr id="7" name="TextBox 6"/>
+          <p:cNvSpPr txBox="1"/>
+          <p:nvPr/>
+        </p:nvSpPr>
+        <p:spPr>
+          <a:xfrm>
+            <a:off x="6231636" y="1188720"/>
+            <a:ext cx="5454396" cy="347472"/>
+          </a:xfrm>
+          <a:prstGeom prst="rect">
+            <a:avLst/>
+          </a:prstGeom>
+          <a:noFill/>
+        </p:spPr>
+        <p:txBody>
+          <a:bodyPr wrap="square">
+            <a:spAutoFit/>
+          </a:bodyPr>
+          <a:lstStyle/>
+          <a:p>
+            <a:pPr algn="l"/>
+            <a:r>
+              <a:rPr sz="1300" b="1" i="0">
                 <a:solidFill>
                   <a:srgbClr val="0B4A8A"/>
                 </a:solidFill>
               </a:rPr>
-              <a:t>Emergency Reassignment (stuck approval)</a:t>
-            </a:r>
-          </a:p>
+              <a:t>Clients</a:t>
+            </a:r>
+          </a:p>
+        </p:txBody>
+      </p:sp>
+      <p:sp>
+        <p:nvSpPr>
+          <p:cNvPr id="8" name="TextBox 7"/>
+          <p:cNvSpPr txBox="1"/>
+          <p:nvPr/>
+        </p:nvSpPr>
+        <p:spPr>
+          <a:xfrm>
+            <a:off x="6231636" y="1554480"/>
+            <a:ext cx="5454396" cy="5074920"/>
+          </a:xfrm>
+          <a:prstGeom prst="rect">
+            <a:avLst/>
+          </a:prstGeom>
+          <a:noFill/>
+        </p:spPr>
+        <p:txBody>
+          <a:bodyPr wrap="square">
+            <a:spAutoFit/>
+          </a:bodyPr>
+          <a:lstStyle/>
           <a:p>
             <a:pPr>
               <a:spcBef>
@@ -5989,7 +6301,7 @@
                   <a:srgbClr val="111111"/>
                 </a:solidFill>
               </a:rPr>
-              <a:t>Identify the stuck request (ask initiator for the form ID)</a:t>
+              <a:t>Sidebar → Administration → Clients</a:t>
             </a:r>
           </a:p>
           <a:p>
@@ -6004,7 +6316,7 @@
                   <a:srgbClr val="111111"/>
                 </a:solidFill>
               </a:rPr>
-              <a:t>Decide target: deputy HOD, peer HOD, or escalate to MD</a:t>
+              <a:t>Clients are external parties whose stock is reserved in your warehouse</a:t>
             </a:r>
           </a:p>
           <a:p>
@@ -6019,7 +6331,7 @@
                   <a:srgbClr val="111111"/>
                 </a:solidFill>
               </a:rPr>
-              <a:t>Document the reassignment in the form's Comments with the reason</a:t>
+              <a:t>Used on GRNs and Issue Slips when the Customer field is set</a:t>
             </a:r>
           </a:p>
           <a:p>
@@ -6034,22 +6346,22 @@
                   <a:srgbClr val="111111"/>
                 </a:solidFill>
               </a:rPr>
-              <a:t>Notify both the new approver and the initiator</a:t>
+              <a:t>Add client: name, code, contact, address, status</a:t>
             </a:r>
           </a:p>
           <a:p>
             <a:pPr>
               <a:spcBef>
-                <a:spcPts val="600"/>
+                <a:spcPts val="300"/>
               </a:spcBef>
             </a:pPr>
             <a:r>
-              <a:rPr sz="1400" b="1">
-                <a:solidFill>
-                  <a:srgbClr val="0B4A8A"/>
-                </a:solidFill>
-              </a:rPr>
-              <a:t>Admin weekly checklist: password resets, new joiners/leavers, FX check, stuck approvals, audit spot-check</a:t>
+              <a:rPr sz="1300">
+                <a:solidFill>
+                  <a:srgbClr val="111111"/>
+                </a:solidFill>
+              </a:rPr>
+              <a:t>Deactivate: set Status to inactive</a:t>
             </a:r>
           </a:p>
         </p:txBody>
@@ -6063,6 +6375,334 @@
 </file>
 
 <file path=ppt/slides/slide7.xml><?xml version="1.0" encoding="utf-8"?>
+<p:sld xmlns:a="http://schemas.openxmlformats.org/drawingml/2006/main" xmlns:p="http://schemas.openxmlformats.org/presentationml/2006/main" xmlns:r="http://schemas.openxmlformats.org/officeDocument/2006/relationships">
+  <p:cSld>
+    <p:spTree>
+      <p:nvGrpSpPr>
+        <p:cNvPr id="1" name=""/>
+        <p:cNvGrpSpPr/>
+        <p:nvPr/>
+      </p:nvGrpSpPr>
+      <p:grpSpPr/>
+      <p:sp>
+        <p:nvSpPr>
+          <p:cNvPr id="2" name="Rectangle 1"/>
+          <p:cNvSpPr/>
+          <p:nvPr/>
+        </p:nvSpPr>
+        <p:spPr>
+          <a:xfrm>
+            <a:off x="0" y="0"/>
+            <a:ext cx="12188952" cy="1051560"/>
+          </a:xfrm>
+          <a:prstGeom prst="rect">
+            <a:avLst/>
+          </a:prstGeom>
+          <a:solidFill>
+            <a:srgbClr val="0B4A8A"/>
+          </a:solidFill>
+          <a:ln>
+            <a:noFill/>
+          </a:ln>
+        </p:spPr>
+        <p:style>
+          <a:lnRef idx="1">
+            <a:schemeClr val="accent1"/>
+          </a:lnRef>
+          <a:fillRef idx="3">
+            <a:schemeClr val="accent1"/>
+          </a:fillRef>
+          <a:effectRef idx="2">
+            <a:schemeClr val="accent1"/>
+          </a:effectRef>
+          <a:fontRef idx="minor">
+            <a:schemeClr val="lt1"/>
+          </a:fontRef>
+        </p:style>
+        <p:txBody>
+          <a:bodyPr rtlCol="0" anchor="ctr"/>
+          <a:lstStyle/>
+          <a:p>
+            <a:pPr algn="ctr"/>
+          </a:p>
+        </p:txBody>
+      </p:sp>
+      <p:sp>
+        <p:nvSpPr>
+          <p:cNvPr id="3" name="TextBox 2"/>
+          <p:cNvSpPr txBox="1"/>
+          <p:nvPr/>
+        </p:nvSpPr>
+        <p:spPr>
+          <a:xfrm>
+            <a:off x="502920" y="274320"/>
+            <a:ext cx="11183112" cy="685800"/>
+          </a:xfrm>
+          <a:prstGeom prst="rect">
+            <a:avLst/>
+          </a:prstGeom>
+          <a:noFill/>
+        </p:spPr>
+        <p:txBody>
+          <a:bodyPr wrap="square">
+            <a:spAutoFit/>
+          </a:bodyPr>
+          <a:lstStyle/>
+          <a:p>
+            <a:pPr algn="l"/>
+            <a:r>
+              <a:rPr sz="2200" b="1" i="0">
+                <a:solidFill>
+                  <a:srgbClr val="FFFFFF"/>
+                </a:solidFill>
+              </a:rPr>
+              <a:t>Budgets, FX, Audit Log &amp; Emergency Reassignment</a:t>
+            </a:r>
+          </a:p>
+        </p:txBody>
+      </p:sp>
+      <p:sp>
+        <p:nvSpPr>
+          <p:cNvPr id="4" name="TextBox 3"/>
+          <p:cNvSpPr txBox="1"/>
+          <p:nvPr/>
+        </p:nvSpPr>
+        <p:spPr>
+          <a:xfrm>
+            <a:off x="502920" y="1188720"/>
+            <a:ext cx="11183112" cy="5440680"/>
+          </a:xfrm>
+          <a:prstGeom prst="rect">
+            <a:avLst/>
+          </a:prstGeom>
+          <a:noFill/>
+        </p:spPr>
+        <p:txBody>
+          <a:bodyPr wrap="square">
+            <a:spAutoFit/>
+          </a:bodyPr>
+          <a:lstStyle/>
+          <a:p>
+            <a:pPr>
+              <a:spcBef>
+                <a:spcPts val="600"/>
+              </a:spcBef>
+            </a:pPr>
+            <a:r>
+              <a:rPr sz="1400" b="1">
+                <a:solidFill>
+                  <a:srgbClr val="0B4A8A"/>
+                </a:solidFill>
+              </a:rPr>
+              <a:t>Budgets</a:t>
+            </a:r>
+          </a:p>
+          <a:p>
+            <a:pPr>
+              <a:spcBef>
+                <a:spcPts val="300"/>
+              </a:spcBef>
+            </a:pPr>
+            <a:r>
+              <a:rPr sz="1300">
+                <a:solidFill>
+                  <a:srgbClr val="111111"/>
+                </a:solidFill>
+              </a:rPr>
+              <a:t>Sidebar → Financial Planning → Budgets — set annual budget per dept in ZMW</a:t>
+            </a:r>
+          </a:p>
+          <a:p>
+            <a:pPr>
+              <a:spcBef>
+                <a:spcPts val="300"/>
+              </a:spcBef>
+            </a:pPr>
+            <a:r>
+              <a:rPr sz="1300">
+                <a:solidFill>
+                  <a:srgbClr val="111111"/>
+                </a:solidFill>
+              </a:rPr>
+              <a:t>Year-end: reset Spent to zero, set new year values; coordinate timing with Finance</a:t>
+            </a:r>
+          </a:p>
+          <a:p>
+            <a:pPr>
+              <a:spcBef>
+                <a:spcPts val="600"/>
+              </a:spcBef>
+            </a:pPr>
+            <a:r>
+              <a:rPr sz="1400" b="1">
+                <a:solidFill>
+                  <a:srgbClr val="0B4A8A"/>
+                </a:solidFill>
+              </a:rPr>
+              <a:t>FX Rates</a:t>
+            </a:r>
+          </a:p>
+          <a:p>
+            <a:pPr>
+              <a:spcBef>
+                <a:spcPts val="300"/>
+              </a:spcBef>
+            </a:pPr>
+            <a:r>
+              <a:rPr sz="1300">
+                <a:solidFill>
+                  <a:srgbClr val="111111"/>
+                </a:solidFill>
+              </a:rPr>
+              <a:t>Sidebar → Financial Planning → FX Rates — update only when Finance is unavailable; document the source</a:t>
+            </a:r>
+          </a:p>
+          <a:p>
+            <a:pPr>
+              <a:spcBef>
+                <a:spcPts val="600"/>
+              </a:spcBef>
+            </a:pPr>
+            <a:r>
+              <a:rPr sz="1400" b="1">
+                <a:solidFill>
+                  <a:srgbClr val="0B4A8A"/>
+                </a:solidFill>
+              </a:rPr>
+              <a:t>Audit Log</a:t>
+            </a:r>
+          </a:p>
+          <a:p>
+            <a:pPr>
+              <a:spcBef>
+                <a:spcPts val="300"/>
+              </a:spcBef>
+            </a:pPr>
+            <a:r>
+              <a:rPr sz="1300">
+                <a:solidFill>
+                  <a:srgbClr val="111111"/>
+                </a:solidFill>
+              </a:rPr>
+              <a:t>Sidebar → Administration → Audit Log — every approval, rejection, and status change is recorded permanently</a:t>
+            </a:r>
+          </a:p>
+          <a:p>
+            <a:pPr>
+              <a:spcBef>
+                <a:spcPts val="300"/>
+              </a:spcBef>
+            </a:pPr>
+            <a:r>
+              <a:rPr sz="1300">
+                <a:solidFill>
+                  <a:srgbClr val="111111"/>
+                </a:solidFill>
+              </a:rPr>
+              <a:t>You cannot modify or delete audit entries — add a comment on the record if correction context is needed</a:t>
+            </a:r>
+          </a:p>
+          <a:p>
+            <a:pPr>
+              <a:spcBef>
+                <a:spcPts val="600"/>
+              </a:spcBef>
+            </a:pPr>
+            <a:r>
+              <a:rPr sz="1400" b="1">
+                <a:solidFill>
+                  <a:srgbClr val="0B4A8A"/>
+                </a:solidFill>
+              </a:rPr>
+              <a:t>Emergency Reassignment (stuck approval)</a:t>
+            </a:r>
+          </a:p>
+          <a:p>
+            <a:pPr>
+              <a:spcBef>
+                <a:spcPts val="300"/>
+              </a:spcBef>
+            </a:pPr>
+            <a:r>
+              <a:rPr sz="1300">
+                <a:solidFill>
+                  <a:srgbClr val="111111"/>
+                </a:solidFill>
+              </a:rPr>
+              <a:t>Identify the stuck request (ask initiator for the form ID)</a:t>
+            </a:r>
+          </a:p>
+          <a:p>
+            <a:pPr>
+              <a:spcBef>
+                <a:spcPts val="300"/>
+              </a:spcBef>
+            </a:pPr>
+            <a:r>
+              <a:rPr sz="1300">
+                <a:solidFill>
+                  <a:srgbClr val="111111"/>
+                </a:solidFill>
+              </a:rPr>
+              <a:t>Decide target: deputy HOD, peer HOD, or escalate to MD</a:t>
+            </a:r>
+          </a:p>
+          <a:p>
+            <a:pPr>
+              <a:spcBef>
+                <a:spcPts val="300"/>
+              </a:spcBef>
+            </a:pPr>
+            <a:r>
+              <a:rPr sz="1300">
+                <a:solidFill>
+                  <a:srgbClr val="111111"/>
+                </a:solidFill>
+              </a:rPr>
+              <a:t>Document the reassignment in the form's Comments with the reason</a:t>
+            </a:r>
+          </a:p>
+          <a:p>
+            <a:pPr>
+              <a:spcBef>
+                <a:spcPts val="300"/>
+              </a:spcBef>
+            </a:pPr>
+            <a:r>
+              <a:rPr sz="1300">
+                <a:solidFill>
+                  <a:srgbClr val="111111"/>
+                </a:solidFill>
+              </a:rPr>
+              <a:t>Notify both the new approver and the initiator</a:t>
+            </a:r>
+          </a:p>
+          <a:p>
+            <a:pPr>
+              <a:spcBef>
+                <a:spcPts val="600"/>
+              </a:spcBef>
+            </a:pPr>
+            <a:r>
+              <a:rPr sz="1400" b="1">
+                <a:solidFill>
+                  <a:srgbClr val="0B4A8A"/>
+                </a:solidFill>
+              </a:rPr>
+              <a:t>Admin weekly checklist: password resets, new joiners/leavers, FX check, stuck approvals, audit spot-check</a:t>
+            </a:r>
+          </a:p>
+        </p:txBody>
+      </p:sp>
+    </p:spTree>
+  </p:cSld>
+  <p:clrMapOvr>
+    <a:masterClrMapping/>
+  </p:clrMapOvr>
+</p:sld>
+</file>
+
+<file path=ppt/slides/slide8.xml><?xml version="1.0" encoding="utf-8"?>
 <p:sld xmlns:a="http://schemas.openxmlformats.org/drawingml/2006/main" xmlns:p="http://schemas.openxmlformats.org/presentationml/2006/main" xmlns:r="http://schemas.openxmlformats.org/officeDocument/2006/relationships">
   <p:cSld>
     <p:spTree>
